--- a/presentations/KM0-Sovereign-Tech-EN.pptx
+++ b/presentations/KM0-Sovereign-Tech-EN.pptx
@@ -4098,7 +4098,7 @@
               </a:defRPr>
             </a:pPr>
             <a:r>
-              <a:t>Vision meeting in Masnou — why and for whom</a:t>
+              <a:t>Vision meeting in Masnou: why and for whom</a:t>
             </a:r>
           </a:p>
         </p:txBody>
@@ -4379,7 +4379,7 @@
               </a:defRPr>
             </a:pPr>
             <a:r>
-              <a:t>Human support and proximity — meet in person if needed</a:t>
+              <a:t>Human support and proximity: meet in person if needed</a:t>
             </a:r>
           </a:p>
           <a:p>
@@ -4900,7 +4900,7 @@
               </a:defRPr>
             </a:pPr>
             <a:r>
-              <a:t>Open, local, and sustainable services — not just another provider</a:t>
+              <a:t>Open, local, and sustainable services, not just another provider</a:t>
             </a:r>
           </a:p>
           <a:p>
@@ -6079,7 +6079,7 @@
               </a:defRPr>
             </a:pPr>
             <a:r>
-              <a:t>KM0 Cloud — live in production</a:t>
+              <a:t>KM0 Cloud, live in production</a:t>
             </a:r>
           </a:p>
         </p:txBody>
@@ -6445,7 +6445,7 @@
               </a:defRPr>
             </a:pPr>
             <a:r>
-              <a:t>OpenCloud — the open platform</a:t>
+              <a:t>OpenCloud, the open platform</a:t>
             </a:r>
           </a:p>
         </p:txBody>
@@ -7423,7 +7423,7 @@
               </a:defRPr>
             </a:pPr>
             <a:r>
-              <a:t>Operated by AMVARA CONSULTING S.L. — ISO/IEC 27001:2022 certified</a:t>
+              <a:t>Operated by AMVARA CONSULTING S.L., ISO/IEC 27001:2022 certified</a:t>
             </a:r>
           </a:p>
           <a:p>
